--- a/exports/pitchbooks/GOOGL_Institutional_Pitchbook.pptx
+++ b/exports/pitchbooks/GOOGL_Institutional_Pitchbook.pptx
@@ -3146,7 +3146,7 @@
               </a:defRPr>
             </a:pPr>
             <a:r>
-              <a:t>Automated Swarm Analysis &amp; Financial Valuation Deck | August 18, 2026</a:t>
+              <a:t>Automated Swarm Analysis &amp; Financial Valuation Deck | August 19, 2026</a:t>
             </a:r>
           </a:p>
         </p:txBody>
